--- a/curso/pptx/S85.pptx
+++ b/curso/pptx/S85.pptx
@@ -4095,7 +4095,7 @@
                 </a:solidFill>
                 <a:latin typeface="Nunito Sans"/>
               </a:rPr>
-              <a:t>Nuestra especie nació en </a:t>
+              <a:t>我们这个物种诞生在</a:t>
             </a:r>
             <a:r>
               <a:rPr sz="2800" b="1">
@@ -4104,7 +4104,7 @@
                 </a:solidFill>
                 <a:latin typeface="Nunito Sans"/>
               </a:rPr>
-              <a:t>África</a:t>
+              <a:t>非洲</a:t>
             </a:r>
             <a:r>
               <a:rPr sz="2800" b="0">
@@ -4113,7 +4113,7 @@
                 </a:solidFill>
                 <a:latin typeface="Nunito Sans"/>
               </a:rPr>
-              <a:t> y desde allí llegó a todo el planeta.</a:t>
+              <a:t>，并从那里走遍了整个地球。</a:t>
             </a:r>
           </a:p>
           <a:p>
@@ -4138,7 +4138,7 @@
                 </a:solidFill>
                 <a:latin typeface="Nunito Sans"/>
               </a:rPr>
-              <a:t>Siglos XIX y XX: muchos vascos emigraron a </a:t>
+              <a:t>19世纪和20世纪：许多巴斯克人移居到</a:t>
             </a:r>
             <a:r>
               <a:rPr sz="2800" b="1">
@@ -4147,7 +4147,7 @@
                 </a:solidFill>
                 <a:latin typeface="Nunito Sans"/>
               </a:rPr>
-              <a:t>América</a:t>
+              <a:t>美洲</a:t>
             </a:r>
             <a:r>
               <a:rPr sz="2800" b="0">
@@ -4156,7 +4156,7 @@
                 </a:solidFill>
                 <a:latin typeface="Nunito Sans"/>
               </a:rPr>
-              <a:t> (Argentina, Uruguay, Chile, Estados Unidos…).</a:t>
+              <a:t>（阿根廷、乌拉圭、智利、美国……）。</a:t>
             </a:r>
           </a:p>
           <a:p>
@@ -4181,7 +4181,7 @@
                 </a:solidFill>
                 <a:latin typeface="Nunito Sans"/>
               </a:rPr>
-              <a:t>Siglo XX: a Bilbao llegó gente de toda España a trabajar en fábricas.</a:t>
+              <a:t>20世纪：来自西班牙各地的人来到毕尔巴鄂，在工厂里工作。</a:t>
             </a:r>
           </a:p>
           <a:p>
@@ -4206,7 +4206,7 @@
                 </a:solidFill>
                 <a:latin typeface="Nunito Sans"/>
               </a:rPr>
-              <a:t>Hoy llega gente de todo el mundo, y también se van jóvenes vascos.</a:t>
+              <a:t>今天，来自世界各地的人来到这里，也有巴斯克的年轻人离开。</a:t>
             </a:r>
           </a:p>
         </p:txBody>
@@ -7038,7 +7038,7 @@
                 </a:solidFill>
                 <a:latin typeface="Nunito Sans"/>
               </a:rPr>
-              <a:t>Económica:</a:t>
+              <a:t>经济上：</a:t>
             </a:r>
             <a:r>
               <a:rPr sz="2800" b="0">
@@ -7047,7 +7047,7 @@
                 </a:solidFill>
                 <a:latin typeface="Nunito Sans"/>
               </a:rPr>
-              <a:t> empresas y productos de todas partes</a:t>
+              <a:t>来自各地的企业和产品</a:t>
             </a:r>
           </a:p>
           <a:p>
@@ -7072,7 +7072,7 @@
                 </a:solidFill>
                 <a:latin typeface="Nunito Sans"/>
               </a:rPr>
-              <a:t>Cultural:</a:t>
+              <a:t>文化上：</a:t>
             </a:r>
             <a:r>
               <a:rPr sz="2800" b="0">
@@ -7081,7 +7081,7 @@
                 </a:solidFill>
                 <a:latin typeface="Nunito Sans"/>
               </a:rPr>
-              <a:t> series, música, comida y redes de todo el mundo</a:t>
+              <a:t>来自世界各地的剧集、音乐、食物和社交网络</a:t>
             </a:r>
           </a:p>
           <a:p>
@@ -7100,31 +7100,22 @@
               <a:t>• </a:t>
             </a:r>
             <a:r>
+              <a:rPr sz="2800" b="1">
+                <a:solidFill>
+                  <a:srgbClr val="1F2A44"/>
+                </a:solidFill>
+                <a:latin typeface="Nunito Sans"/>
+              </a:rPr>
+              <a:t>互联网</a:t>
+            </a:r>
+            <a:r>
               <a:rPr sz="2800" b="0">
                 <a:solidFill>
                   <a:srgbClr val="1F2A44"/>
                 </a:solidFill>
                 <a:latin typeface="Nunito Sans"/>
               </a:rPr>
-              <a:t>La hacen posible </a:t>
-            </a:r>
-            <a:r>
-              <a:rPr sz="2800" b="1">
-                <a:solidFill>
-                  <a:srgbClr val="1F2A44"/>
-                </a:solidFill>
-                <a:latin typeface="Nunito Sans"/>
-              </a:rPr>
-              <a:t>internet</a:t>
-            </a:r>
-            <a:r>
-              <a:rPr sz="2800" b="0">
-                <a:solidFill>
-                  <a:srgbClr val="1F2A44"/>
-                </a:solidFill>
-                <a:latin typeface="Nunito Sans"/>
-              </a:rPr>
-              <a:t> y el transporte barato</a:t>
+              <a:t>和便宜的交通使它成为可能</a:t>
             </a:r>
           </a:p>
         </p:txBody>
@@ -7358,7 +7349,7 @@
                 </a:solidFill>
                 <a:latin typeface="Nunito Sans"/>
               </a:rPr>
-              <a:t>Una serie de otro país, doblada al euskera</a:t>
+              <a:t>一部外国剧集，被配成了巴斯克语</a:t>
             </a:r>
           </a:p>
           <a:p>
@@ -7383,7 +7374,7 @@
                 </a:solidFill>
                 <a:latin typeface="Nunito Sans"/>
               </a:rPr>
-              <a:t>Canciones en euskera con ritmos de todo el mundo</a:t>
+              <a:t>带着世界各地节奏的巴斯克语歌曲</a:t>
             </a:r>
           </a:p>
           <a:p>
@@ -7408,7 +7399,7 @@
                 </a:solidFill>
                 <a:latin typeface="Nunito Sans"/>
               </a:rPr>
-              <a:t>Una app mundial para quedar con tu cuadrilla</a:t>
+              <a:t>一个用来约朋友圈的全球通用应用</a:t>
             </a:r>
           </a:p>
         </p:txBody>
@@ -7642,7 +7633,7 @@
                 </a:solidFill>
                 <a:latin typeface="Nunito Sans"/>
               </a:rPr>
-              <a:t>Emigrar:</a:t>
+              <a:t>移出（emigrar）：</a:t>
             </a:r>
             <a:r>
               <a:rPr sz="2800" b="0">
@@ -7651,7 +7642,7 @@
                 </a:solidFill>
                 <a:latin typeface="Nunito Sans"/>
               </a:rPr>
-              <a:t> salir del lugar donde vivías</a:t>
+              <a:t>离开原来生活的地方</a:t>
             </a:r>
           </a:p>
           <a:p>
@@ -7676,7 +7667,7 @@
                 </a:solidFill>
                 <a:latin typeface="Nunito Sans"/>
               </a:rPr>
-              <a:t>Inmigrar:</a:t>
+              <a:t>移入（inmigrar）：</a:t>
             </a:r>
             <a:r>
               <a:rPr sz="2800" b="0">
@@ -7685,7 +7676,7 @@
                 </a:solidFill>
                 <a:latin typeface="Nunito Sans"/>
               </a:rPr>
-              <a:t> llegar a vivir a un lugar nuevo</a:t>
+              <a:t>来到一个新的地方生活</a:t>
             </a:r>
           </a:p>
           <a:p>
@@ -7710,7 +7701,7 @@
                 </a:solidFill>
                 <a:latin typeface="Nunito Sans"/>
               </a:rPr>
-              <a:t>La misma persona es emigrante allí e inmigrante aquí</a:t>
+              <a:t>同一个人，在那里是移出者，在这里是移入者</a:t>
             </a:r>
           </a:p>
         </p:txBody>
@@ -7901,7 +7892,7 @@
                 </a:solidFill>
                 <a:latin typeface="Nunito Sans"/>
               </a:rPr>
-              <a:t>Trabajo:</a:t>
+              <a:t>工作：</a:t>
             </a:r>
             <a:r>
               <a:rPr sz="2800" b="0">
@@ -7910,7 +7901,7 @@
                 </a:solidFill>
                 <a:latin typeface="Nunito Sans"/>
               </a:rPr>
-              <a:t> buscar un empleo o un sueldo mejor.</a:t>
+              <a:t>寻找工作或更高的收入。</a:t>
             </a:r>
           </a:p>
           <a:p>
@@ -7935,7 +7926,7 @@
                 </a:solidFill>
                 <a:latin typeface="Nunito Sans"/>
               </a:rPr>
-              <a:t>Guerra o persecución:</a:t>
+              <a:t>战争或迫害：</a:t>
             </a:r>
             <a:r>
               <a:rPr sz="2800" b="0">
@@ -7944,7 +7935,7 @@
                 </a:solidFill>
                 <a:latin typeface="Nunito Sans"/>
               </a:rPr>
-              <a:t> huir para salvar la vida.</a:t>
+              <a:t>为了保命而逃离。</a:t>
             </a:r>
           </a:p>
           <a:p>
@@ -7969,7 +7960,7 @@
                 </a:solidFill>
                 <a:latin typeface="Nunito Sans"/>
               </a:rPr>
-              <a:t>Clima y desastres:</a:t>
+              <a:t>气候和灾害：</a:t>
             </a:r>
             <a:r>
               <a:rPr sz="2800" b="0">
@@ -7978,7 +7969,7 @@
                 </a:solidFill>
                 <a:latin typeface="Nunito Sans"/>
               </a:rPr>
-              <a:t> sequías, inundaciones, terremotos.</a:t>
+              <a:t>干旱、洪水、地震。</a:t>
             </a:r>
           </a:p>
           <a:p>
@@ -8003,7 +7994,7 @@
                 </a:solidFill>
                 <a:latin typeface="Nunito Sans"/>
               </a:rPr>
-              <a:t>Familia y estudios:</a:t>
+              <a:t>家庭和学习：</a:t>
             </a:r>
             <a:r>
               <a:rPr sz="2800" b="0">
@@ -8012,7 +8003,7 @@
                 </a:solidFill>
                 <a:latin typeface="Nunito Sans"/>
               </a:rPr>
-              <a:t> reunirse con los suyos, estudiar fuera.</a:t>
+              <a:t>与家人团聚、去外地读书。</a:t>
             </a:r>
           </a:p>
         </p:txBody>

--- a/curso/pptx/S85.pptx
+++ b/curso/pptx/S85.pptx
@@ -4496,7 +4496,7 @@
                 </a:solidFill>
                 <a:latin typeface="Nunito Sans"/>
               </a:rPr>
-              <a:t>Kevin 家的家庭群里收到一条消息：“紧急！移民一到就能领到几千欧元。这是在市政厅工作的朋友说的。快转发！”</a:t>
+              <a:t>一个男孩家的家庭群里收到一条消息：“紧急！移民一到就能领到几千欧元。这是在市政厅工作的朋友说的。快转发！”</a:t>
             </a:r>
           </a:p>
         </p:txBody>
@@ -4805,7 +4805,7 @@
                 </a:solidFill>
                 <a:latin typeface="Nunito Sans"/>
               </a:rPr>
-              <a:t>Aitor 读到一条关于盗窃的新闻。被捕的人出生在另一个国家。Aitor 评论说：“我早就说过：外来的人就是来偷东西的。”</a:t>
+              <a:t>一个男孩读到一条关于盗窃的新闻。被捕的人出生在另一个国家。这个男孩评论说：“我早就说过：外来的人就是来偷东西的。”</a:t>
             </a:r>
           </a:p>
         </p:txBody>
@@ -5114,7 +5114,7 @@
                 </a:solidFill>
                 <a:latin typeface="Nunito Sans"/>
               </a:rPr>
-              <a:t>Naiara 受够了那些针对移民的评论，在聊天里写道：“可移民们全都特别好，而且特别勤劳。”</a:t>
+              <a:t>一个女孩受够了那些针对移民的评论，在聊天里写道：“可移民们全都特别好，而且特别勤劳。”</a:t>
             </a:r>
           </a:p>
         </p:txBody>
@@ -5162,7 +5162,7 @@
                 </a:solidFill>
                 <a:latin typeface="Nunito Sans"/>
               </a:rPr>
-              <a:t>Naiara 在为移民辩护。她的推理是对的吗？</a:t>
+              <a:t>这个女孩在为移民辩护。她的推理是对的吗？</a:t>
             </a:r>
           </a:p>
           <a:p>
